--- a/deliverables/VLA数据预研与管线验证-主管汇报.pptx
+++ b/deliverables/VLA数据预研与管线验证-主管汇报.pptx
@@ -667,7 +667,7 @@
           <a:lstStyle xmlns:a="http://schemas.openxmlformats.org/drawingml/2006/main"/>
           <a:p xmlns:a="http://schemas.openxmlformats.org/drawingml/2006/main">
             <a:r>
-              <a:t>建议用时 45 秒。公司实际落地优先 Ubuntu 服务器，并兼容 Windows。代码和数据契约跨平台，运行库和 wheel 需要按系统准备。Mac 虚拟环境不能直接复制。当前提供校验包和离线模式，两平台 CI 已实际通过 21 项测试；CI 是合成契约测试，真实服务器的编解码、GPU 和内网环境仍要复验。来源：docs/10-linux-windows-offline-deployment.md；https://docs.astral.sh/uv/concepts/projects/layout/。</a:t>
+              <a:t>建议用时 45 秒。公司实际落地优先 Ubuntu 服务器，并兼容 Windows。代码和数据契约跨平台，运行库和 wheel 需要按系统准备。不同操作系统的虚拟环境不能直接复制。当前提供校验包和离线模式，两平台 CI 已实际通过 21 项测试；CI 是合成契约测试，真实服务器的编解码、GPU 和内网环境仍要复验。来源：docs/10-linux-windows-offline-deployment.md；https://docs.astral.sh/uv/concepts/projects/layout/。</a:t>
             </a:r>
           </a:p>
         </p:txBody>
